--- a/assets/pptx/catalog-128.pptx
+++ b/assets/pptx/catalog-128.pptx
@@ -3437,7 +3437,7 @@
                 <a:ea typeface="Ebrima"/>
                 <a:cs typeface="Ebrima"/>
               </a:rPr>
-              <a:t>እግዚኣብሔር ነው ጻድቅ ኣምላክ (4)</a:t>
+              <a:t>እግዚኣብሔር ነው ጻድቅ ኣምላክ 4</a:t>
             </a:r>
           </a:p>
         </p:txBody>
@@ -3697,7 +3697,7 @@
                 <a:ea typeface="Ebrima"/>
                 <a:cs typeface="Ebrima"/>
               </a:rPr>
-              <a:t>እግዚኣብሔር ነው እወነተኛ ኣምላክ (4)</a:t>
+              <a:t>እግዚኣብሔር ነው እወነተኛ ኣምላክ 4</a:t>
             </a:r>
           </a:p>
         </p:txBody>
